--- a/slides.pptx
+++ b/slides.pptx
@@ -1626,7 +1626,18 @@
                 <a:ea typeface="Consolas" pitchFamily="34" charset="-122"/>
                 <a:cs typeface="Consolas" pitchFamily="34" charset="-120"/>
               </a:rPr>
-              <a:t>COMPUTER VISION PROJECT</a:t>
+              <a:t>COMPUTER </a:t>
+            </a:r>
+            <a:r>
+              <a:rPr lang="en-US" sz="1000" kern="0" spc="400">
+                <a:solidFill>
+                  <a:srgbClr val="818CF8"/>
+                </a:solidFill>
+                <a:latin typeface="Consolas" pitchFamily="34" charset="0"/>
+                <a:ea typeface="Consolas" pitchFamily="34" charset="-122"/>
+                <a:cs typeface="Consolas" pitchFamily="34" charset="-120"/>
+              </a:rPr>
+              <a:t>VISION PROJECT – M2 IASD APP</a:t>
             </a:r>
             <a:endParaRPr lang="en-US" sz="1000" dirty="0"/>
           </a:p>
